--- a/ゲーム科1年/00_前期/ゲームプログラミングⅢ/ゲーム数学/座学/21_ベクトルの外積.pptx
+++ b/ゲーム科1年/00_前期/ゲームプログラミングⅢ/ゲーム数学/座学/21_ベクトルの外積.pptx
@@ -269,7 +269,7 @@
           <a:p>
             <a:fld id="{E9CC885B-4903-4D54-9A93-00025F12DED9}" type="datetimeFigureOut">
               <a:rPr kumimoji="1" lang="ja-JP" altLang="en-US" smtClean="0"/>
-              <a:t>2024/10/11</a:t>
+              <a:t>2025/7/8</a:t>
             </a:fld>
             <a:endParaRPr kumimoji="1" lang="ja-JP" altLang="en-US"/>
           </a:p>
@@ -499,7 +499,7 @@
           <a:p>
             <a:fld id="{E9CC885B-4903-4D54-9A93-00025F12DED9}" type="datetimeFigureOut">
               <a:rPr kumimoji="1" lang="ja-JP" altLang="en-US" smtClean="0"/>
-              <a:t>2024/10/11</a:t>
+              <a:t>2025/7/8</a:t>
             </a:fld>
             <a:endParaRPr kumimoji="1" lang="ja-JP" altLang="en-US"/>
           </a:p>
@@ -739,7 +739,7 @@
           <a:p>
             <a:fld id="{E9CC885B-4903-4D54-9A93-00025F12DED9}" type="datetimeFigureOut">
               <a:rPr kumimoji="1" lang="ja-JP" altLang="en-US" smtClean="0"/>
-              <a:t>2024/10/11</a:t>
+              <a:t>2025/7/8</a:t>
             </a:fld>
             <a:endParaRPr kumimoji="1" lang="ja-JP" altLang="en-US"/>
           </a:p>
@@ -969,7 +969,7 @@
           <a:p>
             <a:fld id="{E9CC885B-4903-4D54-9A93-00025F12DED9}" type="datetimeFigureOut">
               <a:rPr kumimoji="1" lang="ja-JP" altLang="en-US" smtClean="0"/>
-              <a:t>2024/10/11</a:t>
+              <a:t>2025/7/8</a:t>
             </a:fld>
             <a:endParaRPr kumimoji="1" lang="ja-JP" altLang="en-US"/>
           </a:p>
@@ -1244,7 +1244,7 @@
           <a:p>
             <a:fld id="{E9CC885B-4903-4D54-9A93-00025F12DED9}" type="datetimeFigureOut">
               <a:rPr kumimoji="1" lang="ja-JP" altLang="en-US" smtClean="0"/>
-              <a:t>2024/10/11</a:t>
+              <a:t>2025/7/8</a:t>
             </a:fld>
             <a:endParaRPr kumimoji="1" lang="ja-JP" altLang="en-US"/>
           </a:p>
@@ -1573,7 +1573,7 @@
           <a:p>
             <a:fld id="{E9CC885B-4903-4D54-9A93-00025F12DED9}" type="datetimeFigureOut">
               <a:rPr kumimoji="1" lang="ja-JP" altLang="en-US" smtClean="0"/>
-              <a:t>2024/10/11</a:t>
+              <a:t>2025/7/8</a:t>
             </a:fld>
             <a:endParaRPr kumimoji="1" lang="ja-JP" altLang="en-US"/>
           </a:p>
@@ -2049,7 +2049,7 @@
           <a:p>
             <a:fld id="{E9CC885B-4903-4D54-9A93-00025F12DED9}" type="datetimeFigureOut">
               <a:rPr kumimoji="1" lang="ja-JP" altLang="en-US" smtClean="0"/>
-              <a:t>2024/10/11</a:t>
+              <a:t>2025/7/8</a:t>
             </a:fld>
             <a:endParaRPr kumimoji="1" lang="ja-JP" altLang="en-US"/>
           </a:p>
@@ -2190,7 +2190,7 @@
           <a:p>
             <a:fld id="{E9CC885B-4903-4D54-9A93-00025F12DED9}" type="datetimeFigureOut">
               <a:rPr kumimoji="1" lang="ja-JP" altLang="en-US" smtClean="0"/>
-              <a:t>2024/10/11</a:t>
+              <a:t>2025/7/8</a:t>
             </a:fld>
             <a:endParaRPr kumimoji="1" lang="ja-JP" altLang="en-US"/>
           </a:p>
@@ -2303,7 +2303,7 @@
           <a:p>
             <a:fld id="{E9CC885B-4903-4D54-9A93-00025F12DED9}" type="datetimeFigureOut">
               <a:rPr kumimoji="1" lang="ja-JP" altLang="en-US" smtClean="0"/>
-              <a:t>2024/10/11</a:t>
+              <a:t>2025/7/8</a:t>
             </a:fld>
             <a:endParaRPr kumimoji="1" lang="ja-JP" altLang="en-US"/>
           </a:p>
@@ -2646,7 +2646,7 @@
           <a:p>
             <a:fld id="{E9CC885B-4903-4D54-9A93-00025F12DED9}" type="datetimeFigureOut">
               <a:rPr kumimoji="1" lang="ja-JP" altLang="en-US" smtClean="0"/>
-              <a:t>2024/10/11</a:t>
+              <a:t>2025/7/8</a:t>
             </a:fld>
             <a:endParaRPr kumimoji="1" lang="ja-JP" altLang="en-US"/>
           </a:p>
@@ -2934,7 +2934,7 @@
           <a:p>
             <a:fld id="{E9CC885B-4903-4D54-9A93-00025F12DED9}" type="datetimeFigureOut">
               <a:rPr kumimoji="1" lang="ja-JP" altLang="en-US" smtClean="0"/>
-              <a:t>2024/10/11</a:t>
+              <a:t>2025/7/8</a:t>
             </a:fld>
             <a:endParaRPr kumimoji="1" lang="ja-JP" altLang="en-US"/>
           </a:p>
@@ -3207,7 +3207,7 @@
           <a:p>
             <a:fld id="{E9CC885B-4903-4D54-9A93-00025F12DED9}" type="datetimeFigureOut">
               <a:rPr kumimoji="1" lang="ja-JP" altLang="en-US" smtClean="0"/>
-              <a:t>2024/10/11</a:t>
+              <a:t>2025/7/8</a:t>
             </a:fld>
             <a:endParaRPr kumimoji="1" lang="ja-JP" altLang="en-US"/>
           </a:p>
@@ -3626,6 +3626,60 @@
       </p:grpSpPr>
       <p:sp>
         <p:nvSpPr>
+          <p:cNvPr id="2" name="四角形: 角を丸くする 1">
+            <a:extLst>
+              <a:ext uri="{FF2B5EF4-FFF2-40B4-BE49-F238E27FC236}">
+                <a16:creationId xmlns:a16="http://schemas.microsoft.com/office/drawing/2014/main" id="{0906918C-4120-4C09-99FB-7A3A1F9E8E51}"/>
+              </a:ext>
+            </a:extLst>
+          </p:cNvPr>
+          <p:cNvSpPr/>
+          <p:nvPr/>
+        </p:nvSpPr>
+        <p:spPr>
+          <a:xfrm>
+            <a:off x="372688" y="2167467"/>
+            <a:ext cx="7518245" cy="1473200"/>
+          </a:xfrm>
+          <a:prstGeom prst="roundRect">
+            <a:avLst/>
+          </a:prstGeom>
+          <a:solidFill>
+            <a:schemeClr val="bg1">
+              <a:lumMod val="85000"/>
+            </a:schemeClr>
+          </a:solidFill>
+          <a:ln>
+            <a:noFill/>
+          </a:ln>
+        </p:spPr>
+        <p:style>
+          <a:lnRef idx="2">
+            <a:schemeClr val="accent1">
+              <a:shade val="50000"/>
+            </a:schemeClr>
+          </a:lnRef>
+          <a:fillRef idx="1">
+            <a:schemeClr val="accent1"/>
+          </a:fillRef>
+          <a:effectRef idx="0">
+            <a:schemeClr val="accent1"/>
+          </a:effectRef>
+          <a:fontRef idx="minor">
+            <a:schemeClr val="lt1"/>
+          </a:fontRef>
+        </p:style>
+        <p:txBody>
+          <a:bodyPr rtlCol="0" anchor="ctr"/>
+          <a:lstStyle/>
+          <a:p>
+            <a:pPr algn="ctr"/>
+            <a:endParaRPr kumimoji="1" lang="ja-JP" altLang="en-US"/>
+          </a:p>
+        </p:txBody>
+      </p:sp>
+      <p:sp>
+        <p:nvSpPr>
           <p:cNvPr id="4" name="テキスト ボックス 3">
             <a:extLst>
               <a:ext uri="{FF2B5EF4-FFF2-40B4-BE49-F238E27FC236}">
@@ -4059,15 +4113,15 @@
                           <a:rPr lang="en-US" altLang="ja-JP" sz="2400" i="1">
                             <a:latin typeface="Cambria Math" panose="02040503050406030204" pitchFamily="18" charset="0"/>
                           </a:rPr>
-                          <m:t>𝑥</m:t>
+                          <m:t>𝑦</m:t>
                         </m:r>
                       </m:e>
                       <m:sub>
                         <m:r>
-                          <a:rPr lang="en-US" altLang="ja-JP" sz="2400" b="0" i="1" smtClean="0">
-                            <a:latin typeface="Cambria Math" panose="02040503050406030204" pitchFamily="18" charset="0"/>
-                          </a:rPr>
-                          <m:t>2</m:t>
+                          <a:rPr lang="en-US" altLang="ja-JP" sz="2400" i="1">
+                            <a:latin typeface="Cambria Math" panose="02040503050406030204" pitchFamily="18" charset="0"/>
+                          </a:rPr>
+                          <m:t>1</m:t>
                         </m:r>
                       </m:sub>
                     </m:sSub>
@@ -4084,7 +4138,7 @@
                           <a:rPr lang="en-US" altLang="ja-JP" sz="2400" i="1">
                             <a:latin typeface="Cambria Math" panose="02040503050406030204" pitchFamily="18" charset="0"/>
                           </a:rPr>
-                          <m:t>𝑦</m:t>
+                          <m:t>𝑥</m:t>
                         </m:r>
                       </m:e>
                       <m:sub>
@@ -4092,7 +4146,7 @@
                           <a:rPr lang="en-US" altLang="ja-JP" sz="2400" b="0" i="1" smtClean="0">
                             <a:latin typeface="Cambria Math" panose="02040503050406030204" pitchFamily="18" charset="0"/>
                           </a:rPr>
-                          <m:t>1</m:t>
+                          <m:t>2</m:t>
                         </m:r>
                       </m:sub>
                     </m:sSub>
@@ -4574,8 +4628,8 @@
           </a:p>
         </p:txBody>
       </p:sp>
-      <mc:AlternateContent xmlns:mc="http://schemas.openxmlformats.org/markup-compatibility/2006">
-        <mc:Choice xmlns:a14="http://schemas.microsoft.com/office/drawing/2010/main" Requires="a14">
+      <mc:AlternateContent xmlns:mc="http://schemas.openxmlformats.org/markup-compatibility/2006" xmlns:a14="http://schemas.microsoft.com/office/drawing/2010/main">
+        <mc:Choice Requires="a14">
           <p:sp>
             <p:nvSpPr>
               <p:cNvPr id="6" name="テキスト ボックス 5">
@@ -4620,31 +4674,7 @@
                       <a:rPr lang="en-US" altLang="ja-JP" sz="2400" i="1">
                         <a:latin typeface="Cambria Math" panose="02040503050406030204" pitchFamily="18" charset="0"/>
                       </a:rPr>
-                      <m:t>=[2, −</m:t>
-                    </m:r>
-                    <m:r>
-                      <a:rPr lang="en-US" altLang="ja-JP" sz="2400" b="0" i="1" smtClean="0">
-                        <a:latin typeface="Cambria Math" panose="02040503050406030204" pitchFamily="18" charset="0"/>
-                      </a:rPr>
-                      <m:t>3</m:t>
-                    </m:r>
-                    <m:r>
-                      <a:rPr lang="en-US" altLang="ja-JP" sz="2400" i="1">
-                        <a:latin typeface="Cambria Math" panose="02040503050406030204" pitchFamily="18" charset="0"/>
-                      </a:rPr>
-                      <m:t>, </m:t>
-                    </m:r>
-                    <m:r>
-                      <a:rPr lang="en-US" altLang="ja-JP" sz="2400" b="0" i="1" smtClean="0">
-                        <a:latin typeface="Cambria Math" panose="02040503050406030204" pitchFamily="18" charset="0"/>
-                      </a:rPr>
-                      <m:t>5</m:t>
-                    </m:r>
-                    <m:r>
-                      <a:rPr lang="en-US" altLang="ja-JP" sz="2400" i="1">
-                        <a:latin typeface="Cambria Math" panose="02040503050406030204" pitchFamily="18" charset="0"/>
-                      </a:rPr>
-                      <m:t>]</m:t>
+                      <m:t>=[2, −3, 5]</m:t>
                     </m:r>
                   </m:oMath>
                 </a14:m>
@@ -4687,13 +4717,7 @@
                           <a:rPr lang="en-US" altLang="ja-JP" sz="2400" i="1">
                             <a:latin typeface="Cambria Math" panose="02040503050406030204" pitchFamily="18" charset="0"/>
                           </a:rPr>
-                          <m:t>1</m:t>
-                        </m:r>
-                        <m:r>
-                          <a:rPr lang="en-US" altLang="ja-JP" sz="2400" i="1">
-                            <a:latin typeface="Cambria Math" panose="02040503050406030204" pitchFamily="18" charset="0"/>
-                          </a:rPr>
-                          <m:t>, </m:t>
+                          <m:t>1, </m:t>
                         </m:r>
                         <m:r>
                           <a:rPr lang="en-US" altLang="ja-JP" sz="2400" b="0" i="1" smtClean="0">
@@ -4726,7 +4750,7 @@
             </p:txBody>
           </p:sp>
         </mc:Choice>
-        <mc:Fallback>
+        <mc:Fallback xmlns="">
           <p:sp>
             <p:nvSpPr>
               <p:cNvPr id="6" name="テキスト ボックス 5">
@@ -4803,6 +4827,60 @@
       </p:grpSpPr>
       <p:sp>
         <p:nvSpPr>
+          <p:cNvPr id="5" name="四角形: 角を丸くする 4">
+            <a:extLst>
+              <a:ext uri="{FF2B5EF4-FFF2-40B4-BE49-F238E27FC236}">
+                <a16:creationId xmlns:a16="http://schemas.microsoft.com/office/drawing/2014/main" id="{85C5135E-2C39-4D0B-9825-BB7FC45CD543}"/>
+              </a:ext>
+            </a:extLst>
+          </p:cNvPr>
+          <p:cNvSpPr/>
+          <p:nvPr/>
+        </p:nvSpPr>
+        <p:spPr>
+          <a:xfrm>
+            <a:off x="332781" y="1891951"/>
+            <a:ext cx="7518245" cy="1350782"/>
+          </a:xfrm>
+          <a:prstGeom prst="roundRect">
+            <a:avLst/>
+          </a:prstGeom>
+          <a:solidFill>
+            <a:schemeClr val="bg1">
+              <a:lumMod val="85000"/>
+            </a:schemeClr>
+          </a:solidFill>
+          <a:ln>
+            <a:noFill/>
+          </a:ln>
+        </p:spPr>
+        <p:style>
+          <a:lnRef idx="2">
+            <a:schemeClr val="accent1">
+              <a:shade val="50000"/>
+            </a:schemeClr>
+          </a:lnRef>
+          <a:fillRef idx="1">
+            <a:schemeClr val="accent1"/>
+          </a:fillRef>
+          <a:effectRef idx="0">
+            <a:schemeClr val="accent1"/>
+          </a:effectRef>
+          <a:fontRef idx="minor">
+            <a:schemeClr val="lt1"/>
+          </a:fontRef>
+        </p:style>
+        <p:txBody>
+          <a:bodyPr rtlCol="0" anchor="ctr"/>
+          <a:lstStyle/>
+          <a:p>
+            <a:pPr algn="ctr"/>
+            <a:endParaRPr kumimoji="1" lang="ja-JP" altLang="en-US"/>
+          </a:p>
+        </p:txBody>
+      </p:sp>
+      <p:sp>
+        <p:nvSpPr>
           <p:cNvPr id="4" name="テキスト ボックス 3">
             <a:extLst>
               <a:ext uri="{FF2B5EF4-FFF2-40B4-BE49-F238E27FC236}">
@@ -4837,8 +4915,8 @@
           </a:p>
         </p:txBody>
       </p:sp>
-      <mc:AlternateContent xmlns:mc="http://schemas.openxmlformats.org/markup-compatibility/2006">
-        <mc:Choice xmlns:a14="http://schemas.microsoft.com/office/drawing/2010/main" Requires="a14">
+      <mc:AlternateContent xmlns:mc="http://schemas.openxmlformats.org/markup-compatibility/2006" xmlns:a14="http://schemas.microsoft.com/office/drawing/2010/main">
+        <mc:Choice Requires="a14">
           <p:sp>
             <p:nvSpPr>
               <p:cNvPr id="6" name="テキスト ボックス 5">
@@ -5058,7 +5136,7 @@
             </p:txBody>
           </p:sp>
         </mc:Choice>
-        <mc:Fallback>
+        <mc:Fallback xmlns="">
           <p:sp>
             <p:nvSpPr>
               <p:cNvPr id="6" name="テキスト ボックス 5">
@@ -5424,7 +5502,31 @@
                       <a:rPr lang="en-US" altLang="ja-JP" sz="2400" b="0" i="1" smtClean="0">
                         <a:latin typeface="Cambria Math" panose="02040503050406030204" pitchFamily="18" charset="0"/>
                       </a:rPr>
-                      <m:t>=50−6=44</m:t>
+                      <m:t>=50−</m:t>
+                    </m:r>
+                    <m:r>
+                      <a:rPr lang="en-US" altLang="ja-JP" sz="2400" b="0" i="1" smtClean="0">
+                        <a:latin typeface="Cambria Math" panose="02040503050406030204" pitchFamily="18" charset="0"/>
+                      </a:rPr>
+                      <m:t>(+</m:t>
+                    </m:r>
+                    <m:r>
+                      <a:rPr lang="en-US" altLang="ja-JP" sz="2400" b="0" i="1" smtClean="0">
+                        <a:latin typeface="Cambria Math" panose="02040503050406030204" pitchFamily="18" charset="0"/>
+                      </a:rPr>
+                      <m:t>6</m:t>
+                    </m:r>
+                    <m:r>
+                      <a:rPr lang="en-US" altLang="ja-JP" sz="2400" b="0" i="1" smtClean="0">
+                        <a:latin typeface="Cambria Math" panose="02040503050406030204" pitchFamily="18" charset="0"/>
+                      </a:rPr>
+                      <m:t>)</m:t>
+                    </m:r>
+                    <m:r>
+                      <a:rPr lang="en-US" altLang="ja-JP" sz="2400" b="0" i="1" smtClean="0">
+                        <a:latin typeface="Cambria Math" panose="02040503050406030204" pitchFamily="18" charset="0"/>
+                      </a:rPr>
+                      <m:t>=44</m:t>
                     </m:r>
                   </m:oMath>
                 </a14:m>
@@ -5573,8 +5675,8 @@
           </a:p>
         </p:txBody>
       </p:sp>
-      <mc:AlternateContent xmlns:mc="http://schemas.openxmlformats.org/markup-compatibility/2006">
-        <mc:Choice xmlns:a14="http://schemas.microsoft.com/office/drawing/2010/main" Requires="a14">
+      <mc:AlternateContent xmlns:mc="http://schemas.openxmlformats.org/markup-compatibility/2006" xmlns:a14="http://schemas.microsoft.com/office/drawing/2010/main">
+        <mc:Choice Requires="a14">
           <p:sp>
             <p:nvSpPr>
               <p:cNvPr id="5" name="テキスト ボックス 4">
@@ -5784,13 +5886,7 @@
                           <a:rPr lang="en-US" altLang="ja-JP" sz="2400" b="0" i="1" dirty="0" smtClean="0">
                             <a:latin typeface="Cambria Math" panose="02040503050406030204" pitchFamily="18" charset="0"/>
                           </a:rPr>
-                          <m:t>−</m:t>
-                        </m:r>
-                        <m:r>
-                          <a:rPr lang="en-US" altLang="ja-JP" sz="2400" b="0" i="1" dirty="0" smtClean="0">
-                            <a:latin typeface="Cambria Math" panose="02040503050406030204" pitchFamily="18" charset="0"/>
-                          </a:rPr>
-                          <m:t>1, 3</m:t>
+                          <m:t>−1, 3</m:t>
                         </m:r>
                       </m:e>
                     </m:d>
@@ -5839,13 +5935,7 @@
                           <a:rPr lang="en-US" altLang="ja-JP" sz="2400" b="0" i="1" dirty="0" smtClean="0">
                             <a:latin typeface="Cambria Math" panose="02040503050406030204" pitchFamily="18" charset="0"/>
                           </a:rPr>
-                          <m:t>−</m:t>
-                        </m:r>
-                        <m:r>
-                          <a:rPr lang="en-US" altLang="ja-JP" sz="2400" b="0" i="1" dirty="0" smtClean="0">
-                            <a:latin typeface="Cambria Math" panose="02040503050406030204" pitchFamily="18" charset="0"/>
-                          </a:rPr>
-                          <m:t>5</m:t>
+                          <m:t>−5</m:t>
                         </m:r>
                       </m:e>
                     </m:d>
@@ -5889,19 +5979,7 @@
                           <a:rPr lang="en-US" altLang="ja-JP" sz="2400" b="0" i="1" dirty="0" smtClean="0">
                             <a:latin typeface="Cambria Math" panose="02040503050406030204" pitchFamily="18" charset="0"/>
                           </a:rPr>
-                          <m:t>10</m:t>
-                        </m:r>
-                        <m:r>
-                          <a:rPr lang="en-US" altLang="ja-JP" sz="2400" b="0" i="1" dirty="0" smtClean="0">
-                            <a:latin typeface="Cambria Math" panose="02040503050406030204" pitchFamily="18" charset="0"/>
-                          </a:rPr>
-                          <m:t>, </m:t>
-                        </m:r>
-                        <m:r>
-                          <a:rPr lang="en-US" altLang="ja-JP" sz="2400" b="0" i="1" dirty="0" smtClean="0">
-                            <a:latin typeface="Cambria Math" panose="02040503050406030204" pitchFamily="18" charset="0"/>
-                          </a:rPr>
-                          <m:t>0</m:t>
+                          <m:t>10, 0</m:t>
                         </m:r>
                       </m:e>
                     </m:d>
@@ -5959,7 +6037,7 @@
             </p:txBody>
           </p:sp>
         </mc:Choice>
-        <mc:Fallback>
+        <mc:Fallback xmlns="">
           <p:sp>
             <p:nvSpPr>
               <p:cNvPr id="5" name="テキスト ボックス 4">
@@ -6036,6 +6114,60 @@
       </p:grpSpPr>
       <p:sp>
         <p:nvSpPr>
+          <p:cNvPr id="11" name="四角形: 角を丸くする 10">
+            <a:extLst>
+              <a:ext uri="{FF2B5EF4-FFF2-40B4-BE49-F238E27FC236}">
+                <a16:creationId xmlns:a16="http://schemas.microsoft.com/office/drawing/2014/main" id="{F31EF662-1D9A-4935-A102-505EBC6D0A53}"/>
+              </a:ext>
+            </a:extLst>
+          </p:cNvPr>
+          <p:cNvSpPr/>
+          <p:nvPr/>
+        </p:nvSpPr>
+        <p:spPr>
+          <a:xfrm>
+            <a:off x="332781" y="1891951"/>
+            <a:ext cx="7518245" cy="1367716"/>
+          </a:xfrm>
+          <a:prstGeom prst="roundRect">
+            <a:avLst/>
+          </a:prstGeom>
+          <a:solidFill>
+            <a:schemeClr val="bg1">
+              <a:lumMod val="85000"/>
+            </a:schemeClr>
+          </a:solidFill>
+          <a:ln>
+            <a:noFill/>
+          </a:ln>
+        </p:spPr>
+        <p:style>
+          <a:lnRef idx="2">
+            <a:schemeClr val="accent1">
+              <a:shade val="50000"/>
+            </a:schemeClr>
+          </a:lnRef>
+          <a:fillRef idx="1">
+            <a:schemeClr val="accent1"/>
+          </a:fillRef>
+          <a:effectRef idx="0">
+            <a:schemeClr val="accent1"/>
+          </a:effectRef>
+          <a:fontRef idx="minor">
+            <a:schemeClr val="lt1"/>
+          </a:fontRef>
+        </p:style>
+        <p:txBody>
+          <a:bodyPr rtlCol="0" anchor="ctr"/>
+          <a:lstStyle/>
+          <a:p>
+            <a:pPr algn="ctr"/>
+            <a:endParaRPr kumimoji="1" lang="ja-JP" altLang="en-US"/>
+          </a:p>
+        </p:txBody>
+      </p:sp>
+      <p:sp>
+        <p:nvSpPr>
           <p:cNvPr id="4" name="テキスト ボックス 3">
             <a:extLst>
               <a:ext uri="{FF2B5EF4-FFF2-40B4-BE49-F238E27FC236}">
@@ -6070,8 +6202,8 @@
           </a:p>
         </p:txBody>
       </p:sp>
-      <mc:AlternateContent xmlns:mc="http://schemas.openxmlformats.org/markup-compatibility/2006">
-        <mc:Choice xmlns:a14="http://schemas.microsoft.com/office/drawing/2010/main" Requires="a14">
+      <mc:AlternateContent xmlns:mc="http://schemas.openxmlformats.org/markup-compatibility/2006" xmlns:a14="http://schemas.microsoft.com/office/drawing/2010/main">
+        <mc:Choice Requires="a14">
           <p:sp>
             <p:nvSpPr>
               <p:cNvPr id="6" name="テキスト ボックス 5">
@@ -7623,7 +7755,7 @@
             </p:txBody>
           </p:sp>
         </mc:Choice>
-        <mc:Fallback>
+        <mc:Fallback xmlns="">
           <p:sp>
             <p:nvSpPr>
               <p:cNvPr id="6" name="テキスト ボックス 5">
@@ -7996,8 +8128,8 @@
           </a:p>
         </p:txBody>
       </p:sp>
-      <mc:AlternateContent xmlns:mc="http://schemas.openxmlformats.org/markup-compatibility/2006">
-        <mc:Choice xmlns:a14="http://schemas.microsoft.com/office/drawing/2010/main" Requires="a14">
+      <mc:AlternateContent xmlns:mc="http://schemas.openxmlformats.org/markup-compatibility/2006" xmlns:a14="http://schemas.microsoft.com/office/drawing/2010/main">
+        <mc:Choice Requires="a14">
           <p:sp>
             <p:nvSpPr>
               <p:cNvPr id="6" name="テキスト ボックス 5">
@@ -8042,43 +8174,7 @@
                       <a:rPr lang="en-US" altLang="ja-JP" sz="2400" b="0" i="1" smtClean="0">
                         <a:latin typeface="Cambria Math" panose="02040503050406030204" pitchFamily="18" charset="0"/>
                       </a:rPr>
-                      <m:t>=[</m:t>
-                    </m:r>
-                    <m:r>
-                      <a:rPr lang="en-US" altLang="ja-JP" sz="2400" b="0" i="1" smtClean="0">
-                        <a:latin typeface="Cambria Math" panose="02040503050406030204" pitchFamily="18" charset="0"/>
-                      </a:rPr>
-                      <m:t>5</m:t>
-                    </m:r>
-                    <m:r>
-                      <a:rPr lang="en-US" altLang="ja-JP" sz="2400" b="0" i="1" smtClean="0">
-                        <a:latin typeface="Cambria Math" panose="02040503050406030204" pitchFamily="18" charset="0"/>
-                      </a:rPr>
-                      <m:t>, −</m:t>
-                    </m:r>
-                    <m:r>
-                      <a:rPr lang="en-US" altLang="ja-JP" sz="2400" b="0" i="1" smtClean="0">
-                        <a:latin typeface="Cambria Math" panose="02040503050406030204" pitchFamily="18" charset="0"/>
-                      </a:rPr>
-                      <m:t>6</m:t>
-                    </m:r>
-                    <m:r>
-                      <a:rPr lang="en-US" altLang="ja-JP" sz="2400" b="0" i="1" smtClean="0">
-                        <a:latin typeface="Cambria Math" panose="02040503050406030204" pitchFamily="18" charset="0"/>
-                      </a:rPr>
-                      <m:t>, </m:t>
-                    </m:r>
-                    <m:r>
-                      <a:rPr lang="en-US" altLang="ja-JP" sz="2400" b="0" i="1" smtClean="0">
-                        <a:latin typeface="Cambria Math" panose="02040503050406030204" pitchFamily="18" charset="0"/>
-                      </a:rPr>
-                      <m:t>0</m:t>
-                    </m:r>
-                    <m:r>
-                      <a:rPr lang="en-US" altLang="ja-JP" sz="2400" b="0" i="1" smtClean="0">
-                        <a:latin typeface="Cambria Math" panose="02040503050406030204" pitchFamily="18" charset="0"/>
-                      </a:rPr>
-                      <m:t>]</m:t>
+                      <m:t>=[5, −6, 0]</m:t>
                     </m:r>
                   </m:oMath>
                 </a14:m>
@@ -8179,13 +8275,7 @@
                       <a:rPr lang="en-US" altLang="ja-JP" sz="2400" b="0" i="1" smtClean="0">
                         <a:latin typeface="Cambria Math" panose="02040503050406030204" pitchFamily="18" charset="0"/>
                       </a:rPr>
-                      <m:t>=[−</m:t>
-                    </m:r>
-                    <m:r>
-                      <a:rPr lang="en-US" altLang="ja-JP" sz="2400" b="0" i="1" smtClean="0">
-                        <a:latin typeface="Cambria Math" panose="02040503050406030204" pitchFamily="18" charset="0"/>
-                      </a:rPr>
-                      <m:t>6</m:t>
+                      <m:t>=[−6</m:t>
                     </m:r>
                     <m:d>
                       <m:dPr>
@@ -8208,13 +8298,7 @@
                       <a:rPr lang="en-US" altLang="ja-JP" sz="2400" b="0" i="1" smtClean="0">
                         <a:latin typeface="Cambria Math" panose="02040503050406030204" pitchFamily="18" charset="0"/>
                       </a:rPr>
-                      <m:t>−</m:t>
-                    </m:r>
-                    <m:r>
-                      <a:rPr lang="en-US" altLang="ja-JP" sz="2400" b="0" i="1" smtClean="0">
-                        <a:latin typeface="Cambria Math" panose="02040503050406030204" pitchFamily="18" charset="0"/>
-                      </a:rPr>
-                      <m:t>0</m:t>
+                      <m:t>−0</m:t>
                     </m:r>
                     <m:d>
                       <m:dPr>
@@ -8237,13 +8321,7 @@
                       <a:rPr lang="en-US" altLang="ja-JP" sz="2400" b="0" i="1" smtClean="0">
                         <a:latin typeface="Cambria Math" panose="02040503050406030204" pitchFamily="18" charset="0"/>
                       </a:rPr>
-                      <m:t>, </m:t>
-                    </m:r>
-                    <m:r>
-                      <a:rPr lang="en-US" altLang="ja-JP" sz="2400" b="0" i="1" smtClean="0">
-                        <a:latin typeface="Cambria Math" panose="02040503050406030204" pitchFamily="18" charset="0"/>
-                      </a:rPr>
-                      <m:t>0</m:t>
+                      <m:t>, 0</m:t>
                     </m:r>
                     <m:d>
                       <m:dPr>
@@ -8266,13 +8344,7 @@
                       <a:rPr lang="en-US" altLang="ja-JP" sz="2400" b="0" i="1" smtClean="0">
                         <a:latin typeface="Cambria Math" panose="02040503050406030204" pitchFamily="18" charset="0"/>
                       </a:rPr>
-                      <m:t>−</m:t>
-                    </m:r>
-                    <m:r>
-                      <a:rPr lang="en-US" altLang="ja-JP" sz="2400" b="0" i="1" smtClean="0">
-                        <a:latin typeface="Cambria Math" panose="02040503050406030204" pitchFamily="18" charset="0"/>
-                      </a:rPr>
-                      <m:t>5</m:t>
+                      <m:t>−5</m:t>
                     </m:r>
                     <m:d>
                       <m:dPr>
@@ -8295,13 +8367,7 @@
                       <a:rPr lang="en-US" altLang="ja-JP" sz="2400" b="0" i="1" smtClean="0">
                         <a:latin typeface="Cambria Math" panose="02040503050406030204" pitchFamily="18" charset="0"/>
                       </a:rPr>
-                      <m:t>, </m:t>
-                    </m:r>
-                    <m:r>
-                      <a:rPr lang="en-US" altLang="ja-JP" sz="2400" b="0" i="1" smtClean="0">
-                        <a:latin typeface="Cambria Math" panose="02040503050406030204" pitchFamily="18" charset="0"/>
-                      </a:rPr>
-                      <m:t>5</m:t>
+                      <m:t>, 5</m:t>
                     </m:r>
                     <m:d>
                       <m:dPr>
@@ -8324,31 +8390,7 @@
                       <a:rPr lang="en-US" altLang="ja-JP" sz="2400" b="0" i="1" smtClean="0">
                         <a:latin typeface="Cambria Math" panose="02040503050406030204" pitchFamily="18" charset="0"/>
                       </a:rPr>
-                      <m:t>−(−</m:t>
-                    </m:r>
-                    <m:r>
-                      <a:rPr lang="en-US" altLang="ja-JP" sz="2400" b="0" i="1" smtClean="0">
-                        <a:latin typeface="Cambria Math" panose="02040503050406030204" pitchFamily="18" charset="0"/>
-                      </a:rPr>
-                      <m:t>6</m:t>
-                    </m:r>
-                    <m:r>
-                      <a:rPr lang="en-US" altLang="ja-JP" sz="2400" b="0" i="1" smtClean="0">
-                        <a:latin typeface="Cambria Math" panose="02040503050406030204" pitchFamily="18" charset="0"/>
-                      </a:rPr>
-                      <m:t>)(</m:t>
-                    </m:r>
-                    <m:r>
-                      <a:rPr lang="en-US" altLang="ja-JP" sz="2400" b="0" i="1" smtClean="0">
-                        <a:latin typeface="Cambria Math" panose="02040503050406030204" pitchFamily="18" charset="0"/>
-                      </a:rPr>
-                      <m:t>1</m:t>
-                    </m:r>
-                    <m:r>
-                      <a:rPr lang="en-US" altLang="ja-JP" sz="2400" b="0" i="1" smtClean="0">
-                        <a:latin typeface="Cambria Math" panose="02040503050406030204" pitchFamily="18" charset="0"/>
-                      </a:rPr>
-                      <m:t>)]</m:t>
+                      <m:t>−(−6)(1)]</m:t>
                     </m:r>
                   </m:oMath>
                 </a14:m>
@@ -8382,85 +8424,7 @@
                       <a:rPr lang="en-US" altLang="ja-JP" sz="2400" b="0" i="1" smtClean="0">
                         <a:latin typeface="Cambria Math" panose="02040503050406030204" pitchFamily="18" charset="0"/>
                       </a:rPr>
-                      <m:t>=[−</m:t>
-                    </m:r>
-                    <m:r>
-                      <a:rPr lang="en-US" altLang="ja-JP" sz="2400" b="0" i="1" smtClean="0">
-                        <a:latin typeface="Cambria Math" panose="02040503050406030204" pitchFamily="18" charset="0"/>
-                      </a:rPr>
-                      <m:t>18</m:t>
-                    </m:r>
-                    <m:r>
-                      <a:rPr lang="en-US" altLang="ja-JP" sz="2400" b="0" i="1" smtClean="0">
-                        <a:latin typeface="Cambria Math" panose="02040503050406030204" pitchFamily="18" charset="0"/>
-                      </a:rPr>
-                      <m:t>−</m:t>
-                    </m:r>
-                    <m:r>
-                      <a:rPr lang="en-US" altLang="ja-JP" sz="2400" b="0" i="1" smtClean="0">
-                        <a:latin typeface="Cambria Math" panose="02040503050406030204" pitchFamily="18" charset="0"/>
-                      </a:rPr>
-                      <m:t>0</m:t>
-                    </m:r>
-                    <m:r>
-                      <a:rPr lang="en-US" altLang="ja-JP" sz="2400" b="0" i="1" smtClean="0">
-                        <a:latin typeface="Cambria Math" panose="02040503050406030204" pitchFamily="18" charset="0"/>
-                      </a:rPr>
-                      <m:t>, </m:t>
-                    </m:r>
-                    <m:r>
-                      <a:rPr lang="en-US" altLang="ja-JP" sz="2400" b="0" i="1" smtClean="0">
-                        <a:latin typeface="Cambria Math" panose="02040503050406030204" pitchFamily="18" charset="0"/>
-                      </a:rPr>
-                      <m:t>0</m:t>
-                    </m:r>
-                    <m:r>
-                      <a:rPr lang="en-US" altLang="ja-JP" sz="2400" b="0" i="1" smtClean="0">
-                        <a:latin typeface="Cambria Math" panose="02040503050406030204" pitchFamily="18" charset="0"/>
-                      </a:rPr>
-                      <m:t>−</m:t>
-                    </m:r>
-                    <m:r>
-                      <a:rPr lang="en-US" altLang="ja-JP" sz="2400" b="0" i="1" smtClean="0">
-                        <a:latin typeface="Cambria Math" panose="02040503050406030204" pitchFamily="18" charset="0"/>
-                      </a:rPr>
-                      <m:t>15</m:t>
-                    </m:r>
-                    <m:r>
-                      <a:rPr lang="en-US" altLang="ja-JP" sz="2400" b="0" i="1" smtClean="0">
-                        <a:latin typeface="Cambria Math" panose="02040503050406030204" pitchFamily="18" charset="0"/>
-                      </a:rPr>
-                      <m:t>, </m:t>
-                    </m:r>
-                    <m:r>
-                      <a:rPr lang="en-US" altLang="ja-JP" sz="2400" b="0" i="1" smtClean="0">
-                        <a:latin typeface="Cambria Math" panose="02040503050406030204" pitchFamily="18" charset="0"/>
-                      </a:rPr>
-                      <m:t>10</m:t>
-                    </m:r>
-                    <m:r>
-                      <a:rPr lang="en-US" altLang="ja-JP" sz="2400" b="0" i="1" smtClean="0">
-                        <a:latin typeface="Cambria Math" panose="02040503050406030204" pitchFamily="18" charset="0"/>
-                      </a:rPr>
-                      <m:t>−</m:t>
-                    </m:r>
-                    <m:r>
-                      <a:rPr lang="en-US" altLang="ja-JP" sz="2400" b="0" i="1" smtClean="0">
-                        <a:latin typeface="Cambria Math" panose="02040503050406030204" pitchFamily="18" charset="0"/>
-                      </a:rPr>
-                      <m:t>(−</m:t>
-                    </m:r>
-                    <m:r>
-                      <a:rPr lang="en-US" altLang="ja-JP" sz="2400" b="0" i="1" smtClean="0">
-                        <a:latin typeface="Cambria Math" panose="02040503050406030204" pitchFamily="18" charset="0"/>
-                      </a:rPr>
-                      <m:t>6</m:t>
-                    </m:r>
-                    <m:r>
-                      <a:rPr lang="en-US" altLang="ja-JP" sz="2400" b="0" i="1" smtClean="0">
-                        <a:latin typeface="Cambria Math" panose="02040503050406030204" pitchFamily="18" charset="0"/>
-                      </a:rPr>
-                      <m:t>)]</m:t>
+                      <m:t>=[−18−0, 0−15, 10−(−6)]</m:t>
                     </m:r>
                   </m:oMath>
                 </a14:m>
@@ -8569,7 +8533,7 @@
             </p:txBody>
           </p:sp>
         </mc:Choice>
-        <mc:Fallback>
+        <mc:Fallback xmlns="">
           <p:sp>
             <p:nvSpPr>
               <p:cNvPr id="6" name="テキスト ボックス 5">
@@ -8680,8 +8644,8 @@
           </a:p>
         </p:txBody>
       </p:sp>
-      <mc:AlternateContent xmlns:mc="http://schemas.openxmlformats.org/markup-compatibility/2006">
-        <mc:Choice xmlns:a14="http://schemas.microsoft.com/office/drawing/2010/main" Requires="a14">
+      <mc:AlternateContent xmlns:mc="http://schemas.openxmlformats.org/markup-compatibility/2006" xmlns:a14="http://schemas.microsoft.com/office/drawing/2010/main">
+        <mc:Choice Requires="a14">
           <p:sp>
             <p:nvSpPr>
               <p:cNvPr id="6" name="テキスト ボックス 5">
@@ -8726,31 +8690,7 @@
                       <a:rPr lang="en-US" altLang="ja-JP" sz="2400" i="1">
                         <a:latin typeface="Cambria Math" panose="02040503050406030204" pitchFamily="18" charset="0"/>
                       </a:rPr>
-                      <m:t>=[2, −</m:t>
-                    </m:r>
-                    <m:r>
-                      <a:rPr lang="en-US" altLang="ja-JP" sz="2400" b="0" i="1" smtClean="0">
-                        <a:latin typeface="Cambria Math" panose="02040503050406030204" pitchFamily="18" charset="0"/>
-                      </a:rPr>
-                      <m:t>3</m:t>
-                    </m:r>
-                    <m:r>
-                      <a:rPr lang="en-US" altLang="ja-JP" sz="2400" i="1">
-                        <a:latin typeface="Cambria Math" panose="02040503050406030204" pitchFamily="18" charset="0"/>
-                      </a:rPr>
-                      <m:t>, </m:t>
-                    </m:r>
-                    <m:r>
-                      <a:rPr lang="en-US" altLang="ja-JP" sz="2400" b="0" i="1" smtClean="0">
-                        <a:latin typeface="Cambria Math" panose="02040503050406030204" pitchFamily="18" charset="0"/>
-                      </a:rPr>
-                      <m:t>5</m:t>
-                    </m:r>
-                    <m:r>
-                      <a:rPr lang="en-US" altLang="ja-JP" sz="2400" i="1">
-                        <a:latin typeface="Cambria Math" panose="02040503050406030204" pitchFamily="18" charset="0"/>
-                      </a:rPr>
-                      <m:t>]</m:t>
+                      <m:t>=[2, −3, 5]</m:t>
                     </m:r>
                   </m:oMath>
                 </a14:m>
@@ -8770,43 +8710,7 @@
                       <a:rPr lang="en-US" altLang="ja-JP" sz="2400" i="1">
                         <a:latin typeface="Cambria Math" panose="02040503050406030204" pitchFamily="18" charset="0"/>
                       </a:rPr>
-                      <m:t>=[</m:t>
-                    </m:r>
-                    <m:r>
-                      <a:rPr lang="en-US" altLang="ja-JP" sz="2400" b="0" i="1" smtClean="0">
-                        <a:latin typeface="Cambria Math" panose="02040503050406030204" pitchFamily="18" charset="0"/>
-                      </a:rPr>
-                      <m:t>−</m:t>
-                    </m:r>
-                    <m:r>
-                      <a:rPr lang="en-US" altLang="ja-JP" sz="2400" i="1">
-                        <a:latin typeface="Cambria Math" panose="02040503050406030204" pitchFamily="18" charset="0"/>
-                      </a:rPr>
-                      <m:t>1</m:t>
-                    </m:r>
-                    <m:r>
-                      <a:rPr lang="en-US" altLang="ja-JP" sz="2400" i="1">
-                        <a:latin typeface="Cambria Math" panose="02040503050406030204" pitchFamily="18" charset="0"/>
-                      </a:rPr>
-                      <m:t>, </m:t>
-                    </m:r>
-                    <m:r>
-                      <a:rPr lang="en-US" altLang="ja-JP" sz="2400" b="0" i="1" smtClean="0">
-                        <a:latin typeface="Cambria Math" panose="02040503050406030204" pitchFamily="18" charset="0"/>
-                      </a:rPr>
-                      <m:t>0</m:t>
-                    </m:r>
-                    <m:r>
-                      <a:rPr lang="en-US" altLang="ja-JP" sz="2400" i="1">
-                        <a:latin typeface="Cambria Math" panose="02040503050406030204" pitchFamily="18" charset="0"/>
-                      </a:rPr>
-                      <m:t>, </m:t>
-                    </m:r>
-                    <m:r>
-                      <a:rPr lang="en-US" altLang="ja-JP" sz="2400" b="0" i="1" smtClean="0">
-                        <a:latin typeface="Cambria Math" panose="02040503050406030204" pitchFamily="18" charset="0"/>
-                      </a:rPr>
-                      <m:t>4</m:t>
+                      <m:t>=[−1, 0, 4</m:t>
                     </m:r>
                     <m:r>
                       <a:rPr lang="en-US" altLang="ja-JP" sz="2400" i="1">
@@ -8825,7 +8729,7 @@
             </p:txBody>
           </p:sp>
         </mc:Choice>
-        <mc:Fallback>
+        <mc:Fallback xmlns="">
           <p:sp>
             <p:nvSpPr>
               <p:cNvPr id="6" name="テキスト ボックス 5">
@@ -8936,8 +8840,8 @@
           </a:p>
         </p:txBody>
       </p:sp>
-      <mc:AlternateContent xmlns:mc="http://schemas.openxmlformats.org/markup-compatibility/2006">
-        <mc:Choice xmlns:a14="http://schemas.microsoft.com/office/drawing/2010/main" Requires="a14">
+      <mc:AlternateContent xmlns:mc="http://schemas.openxmlformats.org/markup-compatibility/2006" xmlns:a14="http://schemas.microsoft.com/office/drawing/2010/main">
+        <mc:Choice Requires="a14">
           <p:sp>
             <p:nvSpPr>
               <p:cNvPr id="6" name="テキスト ボックス 5">
@@ -9064,7 +8968,7 @@
             </p:txBody>
           </p:sp>
         </mc:Choice>
-        <mc:Fallback>
+        <mc:Fallback xmlns="">
           <p:sp>
             <p:nvSpPr>
               <p:cNvPr id="6" name="テキスト ボックス 5">
@@ -9322,8 +9226,8 @@
                 </p:style>
               </p:cxnSp>
             </p:grpSp>
-            <mc:AlternateContent xmlns:mc="http://schemas.openxmlformats.org/markup-compatibility/2006">
-              <mc:Choice xmlns:a14="http://schemas.microsoft.com/office/drawing/2010/main" Requires="a14">
+            <mc:AlternateContent xmlns:mc="http://schemas.openxmlformats.org/markup-compatibility/2006" xmlns:a14="http://schemas.microsoft.com/office/drawing/2010/main">
+              <mc:Choice Requires="a14">
                 <p:sp>
                   <p:nvSpPr>
                     <p:cNvPr id="16" name="テキスト ボックス 15">
@@ -9352,6 +9256,7 @@
                     </a:bodyPr>
                     <a:lstStyle/>
                     <a:p>
+                      <a:pPr/>
                       <a14:m>
                         <m:oMathPara xmlns:m="http://schemas.openxmlformats.org/officeDocument/2006/math">
                           <m:oMathParaPr>
@@ -9372,7 +9277,7 @@
                   </p:txBody>
                 </p:sp>
               </mc:Choice>
-              <mc:Fallback>
+              <mc:Fallback xmlns="">
                 <p:sp>
                   <p:nvSpPr>
                     <p:cNvPr id="16" name="テキスト ボックス 15">
@@ -9417,8 +9322,8 @@
                 </p:sp>
               </mc:Fallback>
             </mc:AlternateContent>
-            <mc:AlternateContent xmlns:mc="http://schemas.openxmlformats.org/markup-compatibility/2006">
-              <mc:Choice xmlns:a14="http://schemas.microsoft.com/office/drawing/2010/main" Requires="a14">
+            <mc:AlternateContent xmlns:mc="http://schemas.openxmlformats.org/markup-compatibility/2006" xmlns:a14="http://schemas.microsoft.com/office/drawing/2010/main">
+              <mc:Choice Requires="a14">
                 <p:sp>
                   <p:nvSpPr>
                     <p:cNvPr id="17" name="テキスト ボックス 16">
@@ -9447,6 +9352,7 @@
                     </a:bodyPr>
                     <a:lstStyle/>
                     <a:p>
+                      <a:pPr/>
                       <a14:m>
                         <m:oMathPara xmlns:m="http://schemas.openxmlformats.org/officeDocument/2006/math">
                           <m:oMathParaPr>
@@ -9467,7 +9373,7 @@
                   </p:txBody>
                 </p:sp>
               </mc:Choice>
-              <mc:Fallback>
+              <mc:Fallback xmlns="">
                 <p:sp>
                   <p:nvSpPr>
                     <p:cNvPr id="17" name="テキスト ボックス 16">
@@ -9512,8 +9418,8 @@
                 </p:sp>
               </mc:Fallback>
             </mc:AlternateContent>
-            <mc:AlternateContent xmlns:mc="http://schemas.openxmlformats.org/markup-compatibility/2006">
-              <mc:Choice xmlns:a14="http://schemas.microsoft.com/office/drawing/2010/main" Requires="a14">
+            <mc:AlternateContent xmlns:mc="http://schemas.openxmlformats.org/markup-compatibility/2006" xmlns:a14="http://schemas.microsoft.com/office/drawing/2010/main">
+              <mc:Choice Requires="a14">
                 <p:sp>
                   <p:nvSpPr>
                     <p:cNvPr id="18" name="テキスト ボックス 17">
@@ -9542,6 +9448,7 @@
                     </a:bodyPr>
                     <a:lstStyle/>
                     <a:p>
+                      <a:pPr/>
                       <a14:m>
                         <m:oMathPara xmlns:m="http://schemas.openxmlformats.org/officeDocument/2006/math">
                           <m:oMathParaPr>
@@ -9574,7 +9481,7 @@
                   </p:txBody>
                 </p:sp>
               </mc:Choice>
-              <mc:Fallback>
+              <mc:Fallback xmlns="">
                 <p:sp>
                   <p:nvSpPr>
                     <p:cNvPr id="18" name="テキスト ボックス 17">
@@ -9863,8 +9770,8 @@
             </a:fontRef>
           </p:style>
         </p:cxnSp>
-        <mc:AlternateContent xmlns:mc="http://schemas.openxmlformats.org/markup-compatibility/2006">
-          <mc:Choice xmlns:a14="http://schemas.microsoft.com/office/drawing/2010/main" Requires="a14">
+        <mc:AlternateContent xmlns:mc="http://schemas.openxmlformats.org/markup-compatibility/2006" xmlns:a14="http://schemas.microsoft.com/office/drawing/2010/main">
+          <mc:Choice Requires="a14">
             <p:sp>
               <p:nvSpPr>
                 <p:cNvPr id="40" name="テキスト ボックス 39">
@@ -9930,7 +9837,7 @@
               </p:txBody>
             </p:sp>
           </mc:Choice>
-          <mc:Fallback>
+          <mc:Fallback xmlns="">
             <p:sp>
               <p:nvSpPr>
                 <p:cNvPr id="40" name="テキスト ボックス 39">
@@ -10042,8 +9949,8 @@
           </a:p>
         </p:txBody>
       </p:sp>
-      <mc:AlternateContent xmlns:mc="http://schemas.openxmlformats.org/markup-compatibility/2006">
-        <mc:Choice xmlns:a14="http://schemas.microsoft.com/office/drawing/2010/main" Requires="a14">
+      <mc:AlternateContent xmlns:mc="http://schemas.openxmlformats.org/markup-compatibility/2006" xmlns:a14="http://schemas.microsoft.com/office/drawing/2010/main">
+        <mc:Choice Requires="a14">
           <p:sp>
             <p:nvSpPr>
               <p:cNvPr id="6" name="テキスト ボックス 5">
@@ -10296,7 +10203,7 @@
             </p:txBody>
           </p:sp>
         </mc:Choice>
-        <mc:Fallback>
+        <mc:Fallback xmlns="">
           <p:sp>
             <p:nvSpPr>
               <p:cNvPr id="6" name="テキスト ボックス 5">
@@ -10554,8 +10461,8 @@
                 </p:style>
               </p:cxnSp>
             </p:grpSp>
-            <mc:AlternateContent xmlns:mc="http://schemas.openxmlformats.org/markup-compatibility/2006">
-              <mc:Choice xmlns:a14="http://schemas.microsoft.com/office/drawing/2010/main" Requires="a14">
+            <mc:AlternateContent xmlns:mc="http://schemas.openxmlformats.org/markup-compatibility/2006" xmlns:a14="http://schemas.microsoft.com/office/drawing/2010/main">
+              <mc:Choice Requires="a14">
                 <p:sp>
                   <p:nvSpPr>
                     <p:cNvPr id="16" name="テキスト ボックス 15">
@@ -10584,6 +10491,7 @@
                     </a:bodyPr>
                     <a:lstStyle/>
                     <a:p>
+                      <a:pPr/>
                       <a14:m>
                         <m:oMathPara xmlns:m="http://schemas.openxmlformats.org/officeDocument/2006/math">
                           <m:oMathParaPr>
@@ -10604,7 +10512,7 @@
                   </p:txBody>
                 </p:sp>
               </mc:Choice>
-              <mc:Fallback>
+              <mc:Fallback xmlns="">
                 <p:sp>
                   <p:nvSpPr>
                     <p:cNvPr id="16" name="テキスト ボックス 15">
@@ -10649,8 +10557,8 @@
                 </p:sp>
               </mc:Fallback>
             </mc:AlternateContent>
-            <mc:AlternateContent xmlns:mc="http://schemas.openxmlformats.org/markup-compatibility/2006">
-              <mc:Choice xmlns:a14="http://schemas.microsoft.com/office/drawing/2010/main" Requires="a14">
+            <mc:AlternateContent xmlns:mc="http://schemas.openxmlformats.org/markup-compatibility/2006" xmlns:a14="http://schemas.microsoft.com/office/drawing/2010/main">
+              <mc:Choice Requires="a14">
                 <p:sp>
                   <p:nvSpPr>
                     <p:cNvPr id="17" name="テキスト ボックス 16">
@@ -10679,6 +10587,7 @@
                     </a:bodyPr>
                     <a:lstStyle/>
                     <a:p>
+                      <a:pPr/>
                       <a14:m>
                         <m:oMathPara xmlns:m="http://schemas.openxmlformats.org/officeDocument/2006/math">
                           <m:oMathParaPr>
@@ -10699,7 +10608,7 @@
                   </p:txBody>
                 </p:sp>
               </mc:Choice>
-              <mc:Fallback>
+              <mc:Fallback xmlns="">
                 <p:sp>
                   <p:nvSpPr>
                     <p:cNvPr id="17" name="テキスト ボックス 16">
@@ -10744,8 +10653,8 @@
                 </p:sp>
               </mc:Fallback>
             </mc:AlternateContent>
-            <mc:AlternateContent xmlns:mc="http://schemas.openxmlformats.org/markup-compatibility/2006">
-              <mc:Choice xmlns:a14="http://schemas.microsoft.com/office/drawing/2010/main" Requires="a14">
+            <mc:AlternateContent xmlns:mc="http://schemas.openxmlformats.org/markup-compatibility/2006" xmlns:a14="http://schemas.microsoft.com/office/drawing/2010/main">
+              <mc:Choice Requires="a14">
                 <p:sp>
                   <p:nvSpPr>
                     <p:cNvPr id="18" name="テキスト ボックス 17">
@@ -10774,6 +10683,7 @@
                     </a:bodyPr>
                     <a:lstStyle/>
                     <a:p>
+                      <a:pPr/>
                       <a14:m>
                         <m:oMathPara xmlns:m="http://schemas.openxmlformats.org/officeDocument/2006/math">
                           <m:oMathParaPr>
@@ -10808,7 +10718,7 @@
                   </p:txBody>
                 </p:sp>
               </mc:Choice>
-              <mc:Fallback>
+              <mc:Fallback xmlns="">
                 <p:sp>
                   <p:nvSpPr>
                     <p:cNvPr id="18" name="テキスト ボックス 17">
@@ -11097,8 +11007,8 @@
             </a:fontRef>
           </p:style>
         </p:cxnSp>
-        <mc:AlternateContent xmlns:mc="http://schemas.openxmlformats.org/markup-compatibility/2006">
-          <mc:Choice xmlns:a14="http://schemas.microsoft.com/office/drawing/2010/main" Requires="a14">
+        <mc:AlternateContent xmlns:mc="http://schemas.openxmlformats.org/markup-compatibility/2006" xmlns:a14="http://schemas.microsoft.com/office/drawing/2010/main">
+          <mc:Choice Requires="a14">
             <p:sp>
               <p:nvSpPr>
                 <p:cNvPr id="40" name="テキスト ボックス 39">
@@ -11164,7 +11074,7 @@
               </p:txBody>
             </p:sp>
           </mc:Choice>
-          <mc:Fallback>
+          <mc:Fallback xmlns="">
             <p:sp>
               <p:nvSpPr>
                 <p:cNvPr id="40" name="テキスト ボックス 39">
@@ -11276,8 +11186,8 @@
           </a:p>
         </p:txBody>
       </p:sp>
-      <mc:AlternateContent xmlns:mc="http://schemas.openxmlformats.org/markup-compatibility/2006">
-        <mc:Choice xmlns:a14="http://schemas.microsoft.com/office/drawing/2010/main" Requires="a14">
+      <mc:AlternateContent xmlns:mc="http://schemas.openxmlformats.org/markup-compatibility/2006" xmlns:a14="http://schemas.microsoft.com/office/drawing/2010/main">
+        <mc:Choice Requires="a14">
           <p:sp>
             <p:nvSpPr>
               <p:cNvPr id="6" name="テキスト ボックス 5">
@@ -11563,49 +11473,7 @@
                       <a:rPr lang="en-US" altLang="ja-JP" sz="2400" b="0" i="1" smtClean="0">
                         <a:latin typeface="Cambria Math" panose="02040503050406030204" pitchFamily="18" charset="0"/>
                       </a:rPr>
-                      <m:t>=[−6−0</m:t>
-                    </m:r>
-                    <m:r>
-                      <a:rPr lang="en-US" altLang="ja-JP" sz="2400" b="0" i="1" smtClean="0">
-                        <a:latin typeface="Cambria Math" panose="02040503050406030204" pitchFamily="18" charset="0"/>
-                      </a:rPr>
-                      <m:t>, </m:t>
-                    </m:r>
-                    <m:r>
-                      <a:rPr lang="en-US" altLang="ja-JP" sz="2400" b="0" i="1" smtClean="0">
-                        <a:latin typeface="Cambria Math" panose="02040503050406030204" pitchFamily="18" charset="0"/>
-                      </a:rPr>
-                      <m:t>0</m:t>
-                    </m:r>
-                    <m:r>
-                      <a:rPr lang="en-US" altLang="ja-JP" sz="2400" b="0" i="1" smtClean="0">
-                        <a:latin typeface="Cambria Math" panose="02040503050406030204" pitchFamily="18" charset="0"/>
-                      </a:rPr>
-                      <m:t>−</m:t>
-                    </m:r>
-                    <m:r>
-                      <a:rPr lang="en-US" altLang="ja-JP" sz="2400" b="0" i="1" smtClean="0">
-                        <a:latin typeface="Cambria Math" panose="02040503050406030204" pitchFamily="18" charset="0"/>
-                      </a:rPr>
-                      <m:t>15</m:t>
-                    </m:r>
-                    <m:r>
-                      <a:rPr lang="en-US" altLang="ja-JP" sz="2400" b="0" i="1" smtClean="0">
-                        <a:latin typeface="Cambria Math" panose="02040503050406030204" pitchFamily="18" charset="0"/>
-                      </a:rPr>
-                      <m:t>, </m:t>
-                    </m:r>
-                    <m:r>
-                      <a:rPr lang="en-US" altLang="ja-JP" sz="2400" b="0" i="1" smtClean="0">
-                        <a:latin typeface="Cambria Math" panose="02040503050406030204" pitchFamily="18" charset="0"/>
-                      </a:rPr>
-                      <m:t>10</m:t>
-                    </m:r>
-                    <m:r>
-                      <a:rPr lang="en-US" altLang="ja-JP" sz="2400" b="0" i="1" smtClean="0">
-                        <a:latin typeface="Cambria Math" panose="02040503050406030204" pitchFamily="18" charset="0"/>
-                      </a:rPr>
-                      <m:t>−(−2)]</m:t>
+                      <m:t>=[−6−0, 0−15, 10−(−2)]</m:t>
                     </m:r>
                   </m:oMath>
                 </a14:m>
@@ -11694,13 +11562,7 @@
                       <a:rPr lang="en-US" altLang="ja-JP" sz="2400" b="0" i="1" smtClean="0">
                         <a:latin typeface="Cambria Math" panose="02040503050406030204" pitchFamily="18" charset="0"/>
                       </a:rPr>
-                      <m:t>||</m:t>
-                    </m:r>
-                    <m:r>
-                      <a:rPr lang="en-US" altLang="ja-JP" sz="2400" b="0" i="1" smtClean="0">
-                        <a:latin typeface="Cambria Math" panose="02040503050406030204" pitchFamily="18" charset="0"/>
-                      </a:rPr>
-                      <m:t>=</m:t>
+                      <m:t>||=</m:t>
                     </m:r>
                     <m:rad>
                       <m:radPr>
@@ -12179,7 +12041,7 @@
             </p:txBody>
           </p:sp>
         </mc:Choice>
-        <mc:Fallback>
+        <mc:Fallback xmlns="">
           <p:sp>
             <p:nvSpPr>
               <p:cNvPr id="6" name="テキスト ボックス 5">

--- a/ゲーム科1年/00_前期/ゲームプログラミングⅢ/ゲーム数学/座学/21_ベクトルの外積.pptx
+++ b/ゲーム科1年/00_前期/ゲームプログラミングⅢ/ゲーム数学/座学/21_ベクトルの外積.pptx
@@ -9913,6 +9913,60 @@
           <a:chExt cx="0" cy="0"/>
         </a:xfrm>
       </p:grpSpPr>
+      <p:sp>
+        <p:nvSpPr>
+          <p:cNvPr id="2" name="四角形: 角を丸くする 1">
+            <a:extLst>
+              <a:ext uri="{FF2B5EF4-FFF2-40B4-BE49-F238E27FC236}">
+                <a16:creationId xmlns:a16="http://schemas.microsoft.com/office/drawing/2014/main" id="{E2630A06-2991-46E8-BD18-697A37285627}"/>
+              </a:ext>
+            </a:extLst>
+          </p:cNvPr>
+          <p:cNvSpPr/>
+          <p:nvPr/>
+        </p:nvSpPr>
+        <p:spPr>
+          <a:xfrm>
+            <a:off x="500430" y="2508775"/>
+            <a:ext cx="6636970" cy="1301564"/>
+          </a:xfrm>
+          <a:prstGeom prst="roundRect">
+            <a:avLst/>
+          </a:prstGeom>
+          <a:solidFill>
+            <a:schemeClr val="bg1">
+              <a:lumMod val="85000"/>
+            </a:schemeClr>
+          </a:solidFill>
+          <a:ln>
+            <a:noFill/>
+          </a:ln>
+        </p:spPr>
+        <p:style>
+          <a:lnRef idx="2">
+            <a:schemeClr val="accent1">
+              <a:shade val="50000"/>
+            </a:schemeClr>
+          </a:lnRef>
+          <a:fillRef idx="1">
+            <a:schemeClr val="accent1"/>
+          </a:fillRef>
+          <a:effectRef idx="0">
+            <a:schemeClr val="accent1"/>
+          </a:effectRef>
+          <a:fontRef idx="minor">
+            <a:schemeClr val="lt1"/>
+          </a:fontRef>
+        </p:style>
+        <p:txBody>
+          <a:bodyPr rtlCol="0" anchor="ctr"/>
+          <a:lstStyle/>
+          <a:p>
+            <a:pPr algn="ctr"/>
+            <a:endParaRPr kumimoji="1" lang="ja-JP" altLang="en-US"/>
+          </a:p>
+        </p:txBody>
+      </p:sp>
       <p:sp>
         <p:nvSpPr>
           <p:cNvPr id="4" name="テキスト ボックス 3">
